--- a/public/fun/pack/pptx/birthdaypro/돌잔치프리미엄_45_첫번째이야기중심_베이비블루.pptx
+++ b/public/fun/pack/pptx/birthdaypro/돌잔치프리미엄_45_첫번째이야기중심_베이비블루.pptx
@@ -112,12 +112,12 @@
   <p:extLst>
     <p:ext uri="{521415D9-36F7-43E2-AB2F-B90AF26B5E84}">
       <p14:sectionLst xmlns:p14="http://schemas.microsoft.com/office/powerpoint/2010/main">
-        <p14:section name="시작" id="{2EAF0223-F85F-421E-842F-077B162FD921}">
+        <p14:section name="시작" id="{F26E0746-74F0-414A-9C98-665062FB2EBD}">
           <p14:sldIdLst>
             <p14:sldId id="256"/>
           </p14:sldIdLst>
         </p14:section>
-        <p14:section name="본문" id="{3E0C859E-47A8-424A-ABDA-651F562DA044}">
+        <p14:section name="본문" id="{C4B55491-10D7-43B0-9A09-92574D883338}">
           <p14:sldIdLst>
             <p14:sldId id="257"/>
             <p14:sldId id="258"/>
@@ -125,7 +125,7 @@
             <p14:sldId id="260"/>
           </p14:sldIdLst>
         </p14:section>
-        <p14:section name="마무리" id="{D4EA20F2-42B0-4BFC-BF6A-6CB6B7871CC5}">
+        <p14:section name="마무리" id="{0D0D37AB-E3B3-4304-B0C9-0C42C036E25C}">
           <p14:sldIdLst>
             <p14:sldId id="261"/>
           </p14:sldIdLst>
@@ -1484,7 +1484,7 @@
             </a:lvl1pPr>
           </a:lstStyle>
           <a:p>
-            <a:fld id="{325858FF-B1AA-4D61-AA7E-0B71612FC60F}" type="slidenum">
+            <a:fld id="{2C0CCB4C-0632-4A89-8DB9-03F5EF2E477D}" type="slidenum">
               <a:rPr lang="en-US"/>
               <a:t>‹#›</a:t>
             </a:fld>
@@ -2272,7 +2272,7 @@
             </a:lvl1pPr>
           </a:lstStyle>
           <a:p>
-            <a:fld id="{4F537E7F-2674-4347-828E-4DF61D0B2E1C}" type="slidenum">
+            <a:fld id="{B06AED7D-4CE0-4D77-9386-631E20C0CF01}" type="slidenum">
               <a:rPr lang="en-US"/>
               <a:t>‹#›</a:t>
             </a:fld>
@@ -3025,7 +3025,7 @@
             </a:lvl1pPr>
           </a:lstStyle>
           <a:p>
-            <a:fld id="{2145ACA9-9808-4D0C-8041-2C1CF8068B4C}" type="slidenum">
+            <a:fld id="{354DCA57-71B8-4AB1-8BC9-2AE43137112D}" type="slidenum">
               <a:rPr lang="en-US"/>
               <a:t>‹#›</a:t>
             </a:fld>
@@ -3973,7 +3973,7 @@
           <a:p>
             <a:r>
               <a:rPr lang="ko-KR"/>
-              <a:t>아기 이름 · 0000. 00. 00</a:t>
+              <a:t>아기 이름 · 날짜 입력</a:t>
             </a:r>
           </a:p>
           <a:p>
@@ -4136,7 +4136,7 @@
           <a:bodyPr/>
           <a:lstStyle/>
           <a:p>
-            <a:fld id="{C31DA0CE-95E9-4911-8AA0-DF62161199CC}" type="slidenum">
+            <a:fld id="{DDD3B94C-740F-49A0-A731-75960F6A8DC2}" type="slidenum">
               <a:rPr lang="en-US"/>
               <a:t>‹#›</a:t>
             </a:fld>
@@ -4736,7 +4736,7 @@
           <a:bodyPr/>
           <a:lstStyle/>
           <a:p>
-            <a:fld id="{382AC738-1B6E-43E1-ADB5-8150BFEC2E18}" type="slidenum">
+            <a:fld id="{EF5D4A86-5CFD-49F6-8C0F-0EFD5913B89F}" type="slidenum">
               <a:rPr lang="en-US"/>
               <a:t>‹#›</a:t>
             </a:fld>
@@ -5711,7 +5711,7 @@
           <a:bodyPr/>
           <a:lstStyle/>
           <a:p>
-            <a:fld id="{BCA9C9C4-E36A-4096-8E04-13DB2007C317}" type="slidenum">
+            <a:fld id="{AFB2C957-0EB1-40E4-A00A-9806076B847B}" type="slidenum">
               <a:rPr lang="en-US"/>
               <a:t>‹#›</a:t>
             </a:fld>
@@ -7333,7 +7333,7 @@
           <a:bodyPr/>
           <a:lstStyle/>
           <a:p>
-            <a:fld id="{932E51A3-18A2-4BAF-96DF-0623088043BF}" type="slidenum">
+            <a:fld id="{5DAC4617-2D44-49E6-9FCD-3A181C5789BE}" type="slidenum">
               <a:rPr lang="en-US"/>
               <a:t>‹#›</a:t>
             </a:fld>
